--- a/dist/weeks-1학기/서비스디자인_1학기_10주차_디자인시스템.pptx
+++ b/dist/weeks-1학기/서비스디자인_1학기_10주차_디자인시스템.pptx
@@ -2888,6 +2888,95 @@
             <a:avLst/>
           </a:prstGeom>
           <a:solidFill>
+            <a:srgbClr val="FFFFFF"/>
+          </a:solidFill>
+          <a:ln w="12700">
+            <a:solidFill>
+              <a:srgbClr val="111111"/>
+            </a:solidFill>
+            <a:prstDash val="solid"/>
+          </a:ln>
+        </p:spPr>
+      </p:sp>
+      <p:sp>
+        <p:nvSpPr>
+          <p:cNvPr id="10" name="Shape 8"/>
+          <p:cNvSpPr/>
+          <p:nvPr/>
+        </p:nvSpPr>
+        <p:spPr>
+          <a:xfrm>
+            <a:off x="640080" y="1627632"/>
+            <a:ext cx="5254600" cy="64008"/>
+          </a:xfrm>
+          <a:prstGeom prst="rect">
+            <a:avLst/>
+          </a:prstGeom>
+          <a:solidFill>
+            <a:srgbClr val="111111"/>
+          </a:solidFill>
+          <a:ln w="12700">
+            <a:solidFill>
+              <a:srgbClr val="111111"/>
+            </a:solidFill>
+            <a:prstDash val="solid"/>
+          </a:ln>
+        </p:spPr>
+      </p:sp>
+      <p:sp>
+        <p:nvSpPr>
+          <p:cNvPr id="11" name="Text 9"/>
+          <p:cNvSpPr/>
+          <p:nvPr/>
+        </p:nvSpPr>
+        <p:spPr>
+          <a:xfrm>
+            <a:off x="1042416" y="1901952"/>
+            <a:ext cx="4449928" cy="365760"/>
+          </a:xfrm>
+          <a:prstGeom prst="rect">
+            <a:avLst/>
+          </a:prstGeom>
+          <a:noFill/>
+          <a:ln/>
+        </p:spPr>
+        <p:txBody>
+          <a:bodyPr wrap="square" lIns="0" tIns="0" rIns="0" bIns="0" rtlCol="0" anchor="ctr"/>
+          <a:lstStyle/>
+          <a:p>
+            <a:pPr indent="0" marL="0">
+              <a:buNone/>
+            </a:pPr>
+            <a:r>
+              <a:rPr lang="en-US" sz="1700" dirty="0">
+                <a:solidFill>
+                  <a:srgbClr val="111111"/>
+                </a:solidFill>
+                <a:latin typeface="Pretendard SemiBold" pitchFamily="34" charset="0"/>
+                <a:ea typeface="Pretendard SemiBold" pitchFamily="34" charset="-122"/>
+                <a:cs typeface="Pretendard SemiBold" pitchFamily="34" charset="-120"/>
+              </a:rPr>
+              <a:t>작동하는 시스템</a:t>
+            </a:r>
+            <a:endParaRPr lang="en-US" sz="1700" dirty="0"/>
+          </a:p>
+        </p:txBody>
+      </p:sp>
+      <p:sp>
+        <p:nvSpPr>
+          <p:cNvPr id="12" name="Shape 10"/>
+          <p:cNvSpPr/>
+          <p:nvPr/>
+        </p:nvSpPr>
+        <p:spPr>
+          <a:xfrm>
+            <a:off x="6297016" y="1627632"/>
+            <a:ext cx="5254600" cy="2761488"/>
+          </a:xfrm>
+          <a:prstGeom prst="rect">
+            <a:avLst/>
+          </a:prstGeom>
+          <a:solidFill>
             <a:srgbClr val="F2F2F2"/>
           </a:solidFill>
           <a:ln w="12700">
@@ -2900,13 +2989,13 @@
       </p:sp>
       <p:sp>
         <p:nvSpPr>
-          <p:cNvPr id="10" name="Text 8"/>
-          <p:cNvSpPr/>
-          <p:nvPr/>
-        </p:nvSpPr>
-        <p:spPr>
-          <a:xfrm>
-            <a:off x="1042416" y="1901952"/>
+          <p:cNvPr id="13" name="Text 11"/>
+          <p:cNvSpPr/>
+          <p:nvPr/>
+        </p:nvSpPr>
+        <p:spPr>
+          <a:xfrm>
+            <a:off x="6699352" y="1901952"/>
             <a:ext cx="4449928" cy="365760"/>
           </a:xfrm>
           <a:prstGeom prst="rect">
@@ -2925,13 +3014,13 @@
             <a:r>
               <a:rPr lang="en-US" sz="1700" dirty="0">
                 <a:solidFill>
-                  <a:srgbClr val="111111"/>
+                  <a:srgbClr val="9B9B9B"/>
                 </a:solidFill>
                 <a:latin typeface="Pretendard SemiBold" pitchFamily="34" charset="0"/>
                 <a:ea typeface="Pretendard SemiBold" pitchFamily="34" charset="-122"/>
                 <a:cs typeface="Pretendard SemiBold" pitchFamily="34" charset="-120"/>
               </a:rPr>
-              <a:t>작동하는 시스템</a:t>
+              <a:t>이름만 시스템</a:t>
             </a:r>
             <a:endParaRPr lang="en-US" sz="1700" dirty="0"/>
           </a:p>
@@ -2939,71 +3028,7 @@
       </p:sp>
       <p:sp>
         <p:nvSpPr>
-          <p:cNvPr id="11" name="Shape 9"/>
-          <p:cNvSpPr/>
-          <p:nvPr/>
-        </p:nvSpPr>
-        <p:spPr>
-          <a:xfrm>
-            <a:off x="6297016" y="1627632"/>
-            <a:ext cx="5254600" cy="2761488"/>
-          </a:xfrm>
-          <a:prstGeom prst="rect">
-            <a:avLst/>
-          </a:prstGeom>
-          <a:solidFill>
-            <a:srgbClr val="FFFFFF"/>
-          </a:solidFill>
-          <a:ln w="12700">
-            <a:solidFill>
-              <a:srgbClr val="DCDCDC"/>
-            </a:solidFill>
-            <a:prstDash val="solid"/>
-          </a:ln>
-        </p:spPr>
-      </p:sp>
-      <p:sp>
-        <p:nvSpPr>
-          <p:cNvPr id="12" name="Text 10"/>
-          <p:cNvSpPr/>
-          <p:nvPr/>
-        </p:nvSpPr>
-        <p:spPr>
-          <a:xfrm>
-            <a:off x="6699352" y="1901952"/>
-            <a:ext cx="4449928" cy="365760"/>
-          </a:xfrm>
-          <a:prstGeom prst="rect">
-            <a:avLst/>
-          </a:prstGeom>
-          <a:noFill/>
-          <a:ln/>
-        </p:spPr>
-        <p:txBody>
-          <a:bodyPr wrap="square" lIns="0" tIns="0" rIns="0" bIns="0" rtlCol="0" anchor="ctr"/>
-          <a:lstStyle/>
-          <a:p>
-            <a:pPr indent="0" marL="0">
-              <a:buNone/>
-            </a:pPr>
-            <a:r>
-              <a:rPr lang="en-US" sz="1700" dirty="0">
-                <a:solidFill>
-                  <a:srgbClr val="9B9B9B"/>
-                </a:solidFill>
-                <a:latin typeface="Pretendard SemiBold" pitchFamily="34" charset="0"/>
-                <a:ea typeface="Pretendard SemiBold" pitchFamily="34" charset="-122"/>
-                <a:cs typeface="Pretendard SemiBold" pitchFamily="34" charset="-120"/>
-              </a:rPr>
-              <a:t>이름만 시스템</a:t>
-            </a:r>
-            <a:endParaRPr lang="en-US" sz="1700" dirty="0"/>
-          </a:p>
-        </p:txBody>
-      </p:sp>
-      <p:sp>
-        <p:nvSpPr>
-          <p:cNvPr id="13" name="Text 11"/>
+          <p:cNvPr id="14" name="Text 12"/>
           <p:cNvSpPr/>
           <p:nvPr/>
         </p:nvSpPr>
@@ -3042,7 +3067,7 @@
       </p:sp>
       <p:sp>
         <p:nvSpPr>
-          <p:cNvPr id="14" name="Text 12"/>
+          <p:cNvPr id="15" name="Text 13"/>
           <p:cNvSpPr/>
           <p:nvPr/>
         </p:nvSpPr>
@@ -3068,7 +3093,7 @@
               <a:buNone/>
             </a:pPr>
             <a:r>
-              <a:rPr lang="en-US" sz="1150" dirty="0">
+              <a:rPr lang="en-US" sz="1150" b="1" dirty="0">
                 <a:solidFill>
                   <a:srgbClr val="1F1F1F"/>
                 </a:solidFill>
@@ -3084,7 +3109,7 @@
       </p:sp>
       <p:sp>
         <p:nvSpPr>
-          <p:cNvPr id="15" name="Text 13"/>
+          <p:cNvPr id="16" name="Text 14"/>
           <p:cNvSpPr/>
           <p:nvPr/>
         </p:nvSpPr>
@@ -3123,7 +3148,7 @@
       </p:sp>
       <p:sp>
         <p:nvSpPr>
-          <p:cNvPr id="16" name="Text 14"/>
+          <p:cNvPr id="17" name="Text 15"/>
           <p:cNvSpPr/>
           <p:nvPr/>
         </p:nvSpPr>
@@ -3165,7 +3190,7 @@
       </p:sp>
       <p:sp>
         <p:nvSpPr>
-          <p:cNvPr id="17" name="Shape 15"/>
+          <p:cNvPr id="18" name="Shape 16"/>
           <p:cNvSpPr/>
           <p:nvPr/>
         </p:nvSpPr>
@@ -3190,7 +3215,7 @@
       </p:sp>
       <p:sp>
         <p:nvSpPr>
-          <p:cNvPr id="18" name="Shape 16"/>
+          <p:cNvPr id="19" name="Shape 17"/>
           <p:cNvSpPr/>
           <p:nvPr/>
         </p:nvSpPr>
@@ -3215,7 +3240,7 @@
       </p:sp>
       <p:sp>
         <p:nvSpPr>
-          <p:cNvPr id="19" name="Text 17"/>
+          <p:cNvPr id="20" name="Text 18"/>
           <p:cNvSpPr/>
           <p:nvPr/>
         </p:nvSpPr>
@@ -3254,7 +3279,7 @@
       </p:sp>
       <p:sp>
         <p:nvSpPr>
-          <p:cNvPr id="20" name="Text 18"/>
+          <p:cNvPr id="21" name="Text 19"/>
           <p:cNvSpPr/>
           <p:nvPr/>
         </p:nvSpPr>
@@ -3280,7 +3305,7 @@
               <a:buNone/>
             </a:pPr>
             <a:r>
-              <a:rPr lang="en-US" sz="1150" dirty="0">
+              <a:rPr lang="en-US" sz="1150" b="1" dirty="0">
                 <a:solidFill>
                   <a:srgbClr val="1F1F1F"/>
                 </a:solidFill>
@@ -3296,7 +3321,7 @@
       </p:sp>
       <p:sp>
         <p:nvSpPr>
-          <p:cNvPr id="21" name="Text 19"/>
+          <p:cNvPr id="22" name="Text 20"/>
           <p:cNvSpPr/>
           <p:nvPr/>
         </p:nvSpPr>
@@ -3335,7 +3360,7 @@
       </p:sp>
       <p:sp>
         <p:nvSpPr>
-          <p:cNvPr id="22" name="Text 20"/>
+          <p:cNvPr id="23" name="Text 21"/>
           <p:cNvSpPr/>
           <p:nvPr/>
         </p:nvSpPr>
@@ -3377,7 +3402,7 @@
       </p:sp>
       <p:sp>
         <p:nvSpPr>
-          <p:cNvPr id="23" name="Shape 21"/>
+          <p:cNvPr id="24" name="Shape 22"/>
           <p:cNvSpPr/>
           <p:nvPr/>
         </p:nvSpPr>
@@ -3402,7 +3427,7 @@
       </p:sp>
       <p:sp>
         <p:nvSpPr>
-          <p:cNvPr id="24" name="Shape 22"/>
+          <p:cNvPr id="25" name="Shape 23"/>
           <p:cNvSpPr/>
           <p:nvPr/>
         </p:nvSpPr>
@@ -3427,7 +3452,7 @@
       </p:sp>
       <p:sp>
         <p:nvSpPr>
-          <p:cNvPr id="25" name="Text 23"/>
+          <p:cNvPr id="26" name="Text 24"/>
           <p:cNvSpPr/>
           <p:nvPr/>
         </p:nvSpPr>
@@ -3466,7 +3491,7 @@
       </p:sp>
       <p:sp>
         <p:nvSpPr>
-          <p:cNvPr id="26" name="Text 24"/>
+          <p:cNvPr id="27" name="Text 25"/>
           <p:cNvSpPr/>
           <p:nvPr/>
         </p:nvSpPr>
@@ -3492,7 +3517,7 @@
               <a:buNone/>
             </a:pPr>
             <a:r>
-              <a:rPr lang="en-US" sz="1150" dirty="0">
+              <a:rPr lang="en-US" sz="1150" b="1" dirty="0">
                 <a:solidFill>
                   <a:srgbClr val="1F1F1F"/>
                 </a:solidFill>
@@ -3508,7 +3533,7 @@
       </p:sp>
       <p:sp>
         <p:nvSpPr>
-          <p:cNvPr id="27" name="Text 25"/>
+          <p:cNvPr id="28" name="Text 26"/>
           <p:cNvSpPr/>
           <p:nvPr/>
         </p:nvSpPr>
@@ -3547,7 +3572,7 @@
       </p:sp>
       <p:sp>
         <p:nvSpPr>
-          <p:cNvPr id="28" name="Text 26"/>
+          <p:cNvPr id="29" name="Text 27"/>
           <p:cNvSpPr/>
           <p:nvPr/>
         </p:nvSpPr>
@@ -3589,7 +3614,7 @@
       </p:sp>
       <p:sp>
         <p:nvSpPr>
-          <p:cNvPr id="29" name="Shape 27"/>
+          <p:cNvPr id="30" name="Shape 28"/>
           <p:cNvSpPr/>
           <p:nvPr/>
         </p:nvSpPr>
@@ -3614,7 +3639,7 @@
       </p:sp>
       <p:sp>
         <p:nvSpPr>
-          <p:cNvPr id="30" name="Text 28"/>
+          <p:cNvPr id="31" name="Text 29"/>
           <p:cNvSpPr/>
           <p:nvPr/>
         </p:nvSpPr>
@@ -3653,7 +3678,7 @@
       </p:sp>
       <p:sp>
         <p:nvSpPr>
-          <p:cNvPr id="31" name="Text 29"/>
+          <p:cNvPr id="32" name="Text 30"/>
           <p:cNvSpPr/>
           <p:nvPr/>
         </p:nvSpPr>
